--- a/PPT文档库/公众号写作全流程-周盛讲师版.pptx
+++ b/PPT文档库/公众号写作全流程-周盛讲师版.pptx
@@ -17185,7 +17185,7 @@
                 <a:ea typeface="Microsoft YaHei" pitchFamily="34" charset="-122"/>
                 <a:cs typeface="Microsoft YaHei" pitchFamily="34" charset="-120"/>
               </a:rPr>
-              <a:t>写作结构：7 段骨架（口播黄金模板）</a:t>
+              <a:t>写作结构：7 步黄金骨架（3-7 分钟口播标准）</a:t>
             </a:r>
             <a:endParaRPr lang="en-US" sz="2200" dirty="0"/>
           </a:p>
@@ -17315,7 +17315,7 @@
                 <a:ea typeface="Microsoft YaHei" pitchFamily="34" charset="-122"/>
                 <a:cs typeface="Microsoft YaHei" pitchFamily="34" charset="-120"/>
               </a:rPr>
-              <a:t>钩子</a:t>
+              <a:t>开场</a:t>
             </a:r>
             <a:endParaRPr lang="en-US" sz="1400" dirty="0"/>
           </a:p>
@@ -17329,7 +17329,7 @@
         </p:nvSpPr>
         <p:spPr>
           <a:xfrm>
-            <a:off x="1463040" y="2057400"/>
+            <a:off x="1463040" y="2011680"/>
             <a:ext cx="1737360" cy="274320"/>
           </a:xfrm>
           <a:prstGeom prst="rect">
@@ -17354,7 +17354,7 @@
                 <a:ea typeface="Microsoft YaHei" pitchFamily="34" charset="-122"/>
                 <a:cs typeface="Microsoft YaHei" pitchFamily="34" charset="-120"/>
               </a:rPr>
-              <a:t>3 秒</a:t>
+              <a:t>15-20s</a:t>
             </a:r>
             <a:endParaRPr lang="en-US" sz="1000" dirty="0"/>
           </a:p>
@@ -17368,7 +17368,71 @@
         </p:nvSpPr>
         <p:spPr>
           <a:xfrm>
-            <a:off x="731520" y="2468880"/>
+            <a:off x="1463040" y="2286000"/>
+            <a:ext cx="1737360" cy="27432"/>
+          </a:xfrm>
+          <a:prstGeom prst="rect">
+            <a:avLst/>
+          </a:prstGeom>
+          <a:solidFill>
+            <a:srgbClr val="8FA88B"/>
+          </a:solidFill>
+          <a:ln w="12700">
+            <a:solidFill>
+              <a:srgbClr val="8FA88B"/>
+            </a:solidFill>
+            <a:prstDash val="solid"/>
+          </a:ln>
+        </p:spPr>
+      </p:sp>
+      <p:sp>
+        <p:nvSpPr>
+          <p:cNvPr id="13" name="Text 11"/>
+          <p:cNvSpPr/>
+          <p:nvPr/>
+        </p:nvSpPr>
+        <p:spPr>
+          <a:xfrm>
+            <a:off x="1463040" y="2304288"/>
+            <a:ext cx="1737360" cy="274320"/>
+          </a:xfrm>
+          <a:prstGeom prst="rect">
+            <a:avLst/>
+          </a:prstGeom>
+          <a:noFill/>
+          <a:ln/>
+        </p:spPr>
+        <p:txBody>
+          <a:bodyPr wrap="square" rtlCol="0" anchor="ctr"/>
+          <a:lstStyle/>
+          <a:p>
+            <a:pPr indent="0" marL="0">
+              <a:buNone/>
+            </a:pPr>
+            <a:r>
+              <a:rPr lang="en-US" sz="900" i="1" dirty="0">
+                <a:solidFill>
+                  <a:srgbClr val="97BC62"/>
+                </a:solidFill>
+                <a:latin typeface="Microsoft YaHei" pitchFamily="34" charset="0"/>
+                <a:ea typeface="Microsoft YaHei" pitchFamily="34" charset="-122"/>
+                <a:cs typeface="Microsoft YaHei" pitchFamily="34" charset="-120"/>
+              </a:rPr>
+              <a:t>抓住观众</a:t>
+            </a:r>
+            <a:endParaRPr lang="en-US" sz="900" dirty="0"/>
+          </a:p>
+        </p:txBody>
+      </p:sp>
+      <p:sp>
+        <p:nvSpPr>
+          <p:cNvPr id="14" name="Shape 12"/>
+          <p:cNvSpPr/>
+          <p:nvPr/>
+        </p:nvSpPr>
+        <p:spPr>
+          <a:xfrm>
+            <a:off x="731520" y="2651760"/>
             <a:ext cx="2331720" cy="27432"/>
           </a:xfrm>
           <a:prstGeom prst="rect">
@@ -17387,14 +17451,14 @@
       </p:sp>
       <p:sp>
         <p:nvSpPr>
-          <p:cNvPr id="13" name="Text 11"/>
-          <p:cNvSpPr/>
-          <p:nvPr/>
-        </p:nvSpPr>
-        <p:spPr>
-          <a:xfrm>
-            <a:off x="731520" y="2560320"/>
-            <a:ext cx="2331720" cy="1005840"/>
+          <p:cNvPr id="15" name="Text 13"/>
+          <p:cNvSpPr/>
+          <p:nvPr/>
+        </p:nvSpPr>
+        <p:spPr>
+          <a:xfrm>
+            <a:off x="731520" y="2743200"/>
+            <a:ext cx="2331720" cy="822960"/>
           </a:xfrm>
           <a:prstGeom prst="rect">
             <a:avLst/>
@@ -17421,7 +17485,7 @@
                 <a:ea typeface="Microsoft YaHei" pitchFamily="34" charset="-122"/>
                 <a:cs typeface="Microsoft YaHei" pitchFamily="34" charset="-120"/>
               </a:rPr>
-              <a:t>数字 / 反常识 / 痛点共鸣</a:t>
+              <a:t>一句话主张 / 问题</a:t>
             </a:r>
             <a:endParaRPr lang="en-US" sz="1000" dirty="0"/>
           </a:p>
@@ -17441,7 +17505,7 @@
                 <a:ea typeface="Microsoft YaHei" pitchFamily="34" charset="-122"/>
                 <a:cs typeface="Microsoft YaHei" pitchFamily="34" charset="-120"/>
               </a:rPr>
-              <a:t>「我和你一样」</a:t>
+              <a:t>反常识开场</a:t>
             </a:r>
             <a:endParaRPr lang="en-US" sz="1000" dirty="0"/>
           </a:p>
@@ -17449,7 +17513,7 @@
       </p:sp>
       <p:sp>
         <p:nvSpPr>
-          <p:cNvPr id="14" name="Shape 12"/>
+          <p:cNvPr id="16" name="Shape 14"/>
           <p:cNvSpPr/>
           <p:nvPr/>
         </p:nvSpPr>
@@ -17476,7 +17540,7 @@
       </p:sp>
       <p:sp>
         <p:nvSpPr>
-          <p:cNvPr id="15" name="Shape 13"/>
+          <p:cNvPr id="17" name="Shape 15"/>
           <p:cNvSpPr/>
           <p:nvPr/>
         </p:nvSpPr>
@@ -17501,7 +17565,7 @@
       </p:sp>
       <p:sp>
         <p:nvSpPr>
-          <p:cNvPr id="16" name="Text 14"/>
+          <p:cNvPr id="18" name="Text 16"/>
           <p:cNvSpPr/>
           <p:nvPr/>
         </p:nvSpPr>
@@ -17540,7 +17604,7 @@
       </p:sp>
       <p:sp>
         <p:nvSpPr>
-          <p:cNvPr id="17" name="Text 15"/>
+          <p:cNvPr id="19" name="Text 17"/>
           <p:cNvSpPr/>
           <p:nvPr/>
         </p:nvSpPr>
@@ -17579,13 +17643,13 @@
       </p:sp>
       <p:sp>
         <p:nvSpPr>
-          <p:cNvPr id="18" name="Text 16"/>
-          <p:cNvSpPr/>
-          <p:nvPr/>
-        </p:nvSpPr>
-        <p:spPr>
-          <a:xfrm>
-            <a:off x="4343400" y="2057400"/>
+          <p:cNvPr id="20" name="Text 18"/>
+          <p:cNvSpPr/>
+          <p:nvPr/>
+        </p:nvSpPr>
+        <p:spPr>
+          <a:xfrm>
+            <a:off x="4343400" y="2011680"/>
             <a:ext cx="1737360" cy="274320"/>
           </a:xfrm>
           <a:prstGeom prst="rect">
@@ -17610,7 +17674,7 @@
                 <a:ea typeface="Microsoft YaHei" pitchFamily="34" charset="-122"/>
                 <a:cs typeface="Microsoft YaHei" pitchFamily="34" charset="-120"/>
               </a:rPr>
-              <a:t>30 秒</a:t>
+              <a:t>30-45s</a:t>
             </a:r>
             <a:endParaRPr lang="en-US" sz="1000" dirty="0"/>
           </a:p>
@@ -17618,13 +17682,77 @@
       </p:sp>
       <p:sp>
         <p:nvSpPr>
-          <p:cNvPr id="19" name="Shape 17"/>
-          <p:cNvSpPr/>
-          <p:nvPr/>
-        </p:nvSpPr>
-        <p:spPr>
-          <a:xfrm>
-            <a:off x="3611880" y="2468880"/>
+          <p:cNvPr id="21" name="Shape 19"/>
+          <p:cNvSpPr/>
+          <p:nvPr/>
+        </p:nvSpPr>
+        <p:spPr>
+          <a:xfrm>
+            <a:off x="4343400" y="2286000"/>
+            <a:ext cx="1737360" cy="27432"/>
+          </a:xfrm>
+          <a:prstGeom prst="rect">
+            <a:avLst/>
+          </a:prstGeom>
+          <a:solidFill>
+            <a:srgbClr val="8FA88B"/>
+          </a:solidFill>
+          <a:ln w="12700">
+            <a:solidFill>
+              <a:srgbClr val="8FA88B"/>
+            </a:solidFill>
+            <a:prstDash val="solid"/>
+          </a:ln>
+        </p:spPr>
+      </p:sp>
+      <p:sp>
+        <p:nvSpPr>
+          <p:cNvPr id="22" name="Text 20"/>
+          <p:cNvSpPr/>
+          <p:nvPr/>
+        </p:nvSpPr>
+        <p:spPr>
+          <a:xfrm>
+            <a:off x="4343400" y="2304288"/>
+            <a:ext cx="1737360" cy="274320"/>
+          </a:xfrm>
+          <a:prstGeom prst="rect">
+            <a:avLst/>
+          </a:prstGeom>
+          <a:noFill/>
+          <a:ln/>
+        </p:spPr>
+        <p:txBody>
+          <a:bodyPr wrap="square" rtlCol="0" anchor="ctr"/>
+          <a:lstStyle/>
+          <a:p>
+            <a:pPr indent="0" marL="0">
+              <a:buNone/>
+            </a:pPr>
+            <a:r>
+              <a:rPr lang="en-US" sz="900" i="1" dirty="0">
+                <a:solidFill>
+                  <a:srgbClr val="97BC62"/>
+                </a:solidFill>
+                <a:latin typeface="Microsoft YaHei" pitchFamily="34" charset="0"/>
+                <a:ea typeface="Microsoft YaHei" pitchFamily="34" charset="-122"/>
+                <a:cs typeface="Microsoft YaHei" pitchFamily="34" charset="-120"/>
+              </a:rPr>
+              <a:t>制造共鸣</a:t>
+            </a:r>
+            <a:endParaRPr lang="en-US" sz="900" dirty="0"/>
+          </a:p>
+        </p:txBody>
+      </p:sp>
+      <p:sp>
+        <p:nvSpPr>
+          <p:cNvPr id="23" name="Shape 21"/>
+          <p:cNvSpPr/>
+          <p:nvPr/>
+        </p:nvSpPr>
+        <p:spPr>
+          <a:xfrm>
+            <a:off x="3611880" y="2651760"/>
             <a:ext cx="2331720" cy="27432"/>
           </a:xfrm>
           <a:prstGeom prst="rect">
@@ -17643,14 +17771,14 @@
       </p:sp>
       <p:sp>
         <p:nvSpPr>
-          <p:cNvPr id="20" name="Text 18"/>
-          <p:cNvSpPr/>
-          <p:nvPr/>
-        </p:nvSpPr>
-        <p:spPr>
-          <a:xfrm>
-            <a:off x="3611880" y="2560320"/>
-            <a:ext cx="2331720" cy="1005840"/>
+          <p:cNvPr id="24" name="Text 22"/>
+          <p:cNvSpPr/>
+          <p:nvPr/>
+        </p:nvSpPr>
+        <p:spPr>
+          <a:xfrm>
+            <a:off x="3611880" y="2743200"/>
+            <a:ext cx="2331720" cy="822960"/>
           </a:xfrm>
           <a:prstGeom prst="rect">
             <a:avLst/>
@@ -17677,7 +17805,7 @@
                 <a:ea typeface="Microsoft YaHei" pitchFamily="34" charset="-122"/>
                 <a:cs typeface="Microsoft YaHei" pitchFamily="34" charset="-120"/>
               </a:rPr>
-              <a:t>读者撞墙场景</a:t>
+              <a:t>现状困境 + 为什么</a:t>
             </a:r>
             <a:endParaRPr lang="en-US" sz="1000" dirty="0"/>
           </a:p>
@@ -17697,7 +17825,7 @@
                 <a:ea typeface="Microsoft YaHei" pitchFamily="34" charset="-122"/>
                 <a:cs typeface="Microsoft YaHei" pitchFamily="34" charset="-120"/>
               </a:rPr>
-              <a:t>越具体越好</a:t>
+              <a:t>+ 不做的代价</a:t>
             </a:r>
             <a:endParaRPr lang="en-US" sz="1000" dirty="0"/>
           </a:p>
@@ -17705,7 +17833,7 @@
       </p:sp>
       <p:sp>
         <p:nvSpPr>
-          <p:cNvPr id="21" name="Shape 19"/>
+          <p:cNvPr id="25" name="Shape 23"/>
           <p:cNvSpPr/>
           <p:nvPr/>
         </p:nvSpPr>
@@ -17732,7 +17860,7 @@
       </p:sp>
       <p:sp>
         <p:nvSpPr>
-          <p:cNvPr id="22" name="Shape 20"/>
+          <p:cNvPr id="26" name="Shape 24"/>
           <p:cNvSpPr/>
           <p:nvPr/>
         </p:nvSpPr>
@@ -17757,7 +17885,7 @@
       </p:sp>
       <p:sp>
         <p:nvSpPr>
-          <p:cNvPr id="23" name="Text 21"/>
+          <p:cNvPr id="27" name="Text 25"/>
           <p:cNvSpPr/>
           <p:nvPr/>
         </p:nvSpPr>
@@ -17796,7 +17924,7 @@
       </p:sp>
       <p:sp>
         <p:nvSpPr>
-          <p:cNvPr id="24" name="Text 22"/>
+          <p:cNvPr id="28" name="Text 26"/>
           <p:cNvSpPr/>
           <p:nvPr/>
         </p:nvSpPr>
@@ -17827,7 +17955,7 @@
                 <a:ea typeface="Microsoft YaHei" pitchFamily="34" charset="-122"/>
                 <a:cs typeface="Microsoft YaHei" pitchFamily="34" charset="-120"/>
               </a:rPr>
-              <a:t>故事</a:t>
+              <a:t>故事 / 案例</a:t>
             </a:r>
             <a:endParaRPr lang="en-US" sz="1400" dirty="0"/>
           </a:p>
@@ -17835,13 +17963,13 @@
       </p:sp>
       <p:sp>
         <p:nvSpPr>
-          <p:cNvPr id="25" name="Text 23"/>
-          <p:cNvSpPr/>
-          <p:nvPr/>
-        </p:nvSpPr>
-        <p:spPr>
-          <a:xfrm>
-            <a:off x="7223760" y="2057400"/>
+          <p:cNvPr id="29" name="Text 27"/>
+          <p:cNvSpPr/>
+          <p:nvPr/>
+        </p:nvSpPr>
+        <p:spPr>
+          <a:xfrm>
+            <a:off x="7223760" y="2011680"/>
             <a:ext cx="1737360" cy="274320"/>
           </a:xfrm>
           <a:prstGeom prst="rect">
@@ -17866,7 +17994,7 @@
                 <a:ea typeface="Microsoft YaHei" pitchFamily="34" charset="-122"/>
                 <a:cs typeface="Microsoft YaHei" pitchFamily="34" charset="-120"/>
               </a:rPr>
-              <a:t>60-90 秒</a:t>
+              <a:t>60-90s</a:t>
             </a:r>
             <a:endParaRPr lang="en-US" sz="1000" dirty="0"/>
           </a:p>
@@ -17874,13 +18002,77 @@
       </p:sp>
       <p:sp>
         <p:nvSpPr>
-          <p:cNvPr id="26" name="Shape 24"/>
-          <p:cNvSpPr/>
-          <p:nvPr/>
-        </p:nvSpPr>
-        <p:spPr>
-          <a:xfrm>
-            <a:off x="6492240" y="2468880"/>
+          <p:cNvPr id="30" name="Shape 28"/>
+          <p:cNvSpPr/>
+          <p:nvPr/>
+        </p:nvSpPr>
+        <p:spPr>
+          <a:xfrm>
+            <a:off x="7223760" y="2286000"/>
+            <a:ext cx="1737360" cy="27432"/>
+          </a:xfrm>
+          <a:prstGeom prst="rect">
+            <a:avLst/>
+          </a:prstGeom>
+          <a:solidFill>
+            <a:srgbClr val="8FA88B"/>
+          </a:solidFill>
+          <a:ln w="12700">
+            <a:solidFill>
+              <a:srgbClr val="8FA88B"/>
+            </a:solidFill>
+            <a:prstDash val="solid"/>
+          </a:ln>
+        </p:spPr>
+      </p:sp>
+      <p:sp>
+        <p:nvSpPr>
+          <p:cNvPr id="31" name="Text 29"/>
+          <p:cNvSpPr/>
+          <p:nvPr/>
+        </p:nvSpPr>
+        <p:spPr>
+          <a:xfrm>
+            <a:off x="7223760" y="2304288"/>
+            <a:ext cx="1737360" cy="274320"/>
+          </a:xfrm>
+          <a:prstGeom prst="rect">
+            <a:avLst/>
+          </a:prstGeom>
+          <a:noFill/>
+          <a:ln/>
+        </p:spPr>
+        <p:txBody>
+          <a:bodyPr wrap="square" rtlCol="0" anchor="ctr"/>
+          <a:lstStyle/>
+          <a:p>
+            <a:pPr indent="0" marL="0">
+              <a:buNone/>
+            </a:pPr>
+            <a:r>
+              <a:rPr lang="en-US" sz="900" i="1" dirty="0">
+                <a:solidFill>
+                  <a:srgbClr val="97BC62"/>
+                </a:solidFill>
+                <a:latin typeface="Microsoft YaHei" pitchFamily="34" charset="0"/>
+                <a:ea typeface="Microsoft YaHei" pitchFamily="34" charset="-122"/>
+                <a:cs typeface="Microsoft YaHei" pitchFamily="34" charset="-120"/>
+              </a:rPr>
+              <a:t>画面感证明</a:t>
+            </a:r>
+            <a:endParaRPr lang="en-US" sz="900" dirty="0"/>
+          </a:p>
+        </p:txBody>
+      </p:sp>
+      <p:sp>
+        <p:nvSpPr>
+          <p:cNvPr id="32" name="Shape 30"/>
+          <p:cNvSpPr/>
+          <p:nvPr/>
+        </p:nvSpPr>
+        <p:spPr>
+          <a:xfrm>
+            <a:off x="6492240" y="2651760"/>
             <a:ext cx="2331720" cy="27432"/>
           </a:xfrm>
           <a:prstGeom prst="rect">
@@ -17899,14 +18091,14 @@
       </p:sp>
       <p:sp>
         <p:nvSpPr>
-          <p:cNvPr id="27" name="Text 25"/>
-          <p:cNvSpPr/>
-          <p:nvPr/>
-        </p:nvSpPr>
-        <p:spPr>
-          <a:xfrm>
-            <a:off x="6492240" y="2560320"/>
-            <a:ext cx="2331720" cy="1005840"/>
+          <p:cNvPr id="33" name="Text 31"/>
+          <p:cNvSpPr/>
+          <p:nvPr/>
+        </p:nvSpPr>
+        <p:spPr>
+          <a:xfrm>
+            <a:off x="6492240" y="2743200"/>
+            <a:ext cx="2331720" cy="822960"/>
           </a:xfrm>
           <a:prstGeom prst="rect">
             <a:avLst/>
@@ -17933,7 +18125,7 @@
                 <a:ea typeface="Microsoft YaHei" pitchFamily="34" charset="-122"/>
                 <a:cs typeface="Microsoft YaHei" pitchFamily="34" charset="-120"/>
               </a:rPr>
-              <a:t>真实撞墙案例</a:t>
+              <a:t>发生了什么</a:t>
             </a:r>
             <a:endParaRPr lang="en-US" sz="1000" dirty="0"/>
           </a:p>
@@ -17953,7 +18145,7 @@
                 <a:ea typeface="Microsoft YaHei" pitchFamily="34" charset="-122"/>
                 <a:cs typeface="Microsoft YaHei" pitchFamily="34" charset="-120"/>
               </a:rPr>
-              <a:t>不是鸡汤</a:t>
+              <a:t>转折点 + 结果</a:t>
             </a:r>
             <a:endParaRPr lang="en-US" sz="1000" dirty="0"/>
           </a:p>
@@ -17961,7 +18153,7 @@
       </p:sp>
       <p:sp>
         <p:nvSpPr>
-          <p:cNvPr id="28" name="Shape 26"/>
+          <p:cNvPr id="34" name="Shape 32"/>
           <p:cNvSpPr/>
           <p:nvPr/>
         </p:nvSpPr>
@@ -17988,7 +18180,7 @@
       </p:sp>
       <p:sp>
         <p:nvSpPr>
-          <p:cNvPr id="29" name="Shape 27"/>
+          <p:cNvPr id="35" name="Shape 33"/>
           <p:cNvSpPr/>
           <p:nvPr/>
         </p:nvSpPr>
@@ -18013,7 +18205,7 @@
       </p:sp>
       <p:sp>
         <p:nvSpPr>
-          <p:cNvPr id="30" name="Text 28"/>
+          <p:cNvPr id="36" name="Text 34"/>
           <p:cNvSpPr/>
           <p:nvPr/>
         </p:nvSpPr>
@@ -18052,7 +18244,7 @@
       </p:sp>
       <p:sp>
         <p:nvSpPr>
-          <p:cNvPr id="31" name="Text 29"/>
+          <p:cNvPr id="37" name="Text 35"/>
           <p:cNvSpPr/>
           <p:nvPr/>
         </p:nvSpPr>
@@ -18083,7 +18275,7 @@
                 <a:ea typeface="Microsoft YaHei" pitchFamily="34" charset="-122"/>
                 <a:cs typeface="Microsoft YaHei" pitchFamily="34" charset="-120"/>
               </a:rPr>
-              <a:t>洞见</a:t>
+              <a:t>观点萃取</a:t>
             </a:r>
             <a:endParaRPr lang="en-US" sz="1400" dirty="0"/>
           </a:p>
@@ -18091,13 +18283,13 @@
       </p:sp>
       <p:sp>
         <p:nvSpPr>
-          <p:cNvPr id="32" name="Text 30"/>
-          <p:cNvSpPr/>
-          <p:nvPr/>
-        </p:nvSpPr>
-        <p:spPr>
-          <a:xfrm>
-            <a:off x="10104120" y="2057400"/>
+          <p:cNvPr id="38" name="Text 36"/>
+          <p:cNvSpPr/>
+          <p:nvPr/>
+        </p:nvSpPr>
+        <p:spPr>
+          <a:xfrm>
+            <a:off x="10104120" y="2011680"/>
             <a:ext cx="1737360" cy="274320"/>
           </a:xfrm>
           <a:prstGeom prst="rect">
@@ -18122,7 +18314,7 @@
                 <a:ea typeface="Microsoft YaHei" pitchFamily="34" charset="-122"/>
                 <a:cs typeface="Microsoft YaHei" pitchFamily="34" charset="-120"/>
               </a:rPr>
-              <a:t>20-30 秒</a:t>
+              <a:t>20-30s</a:t>
             </a:r>
             <a:endParaRPr lang="en-US" sz="1000" dirty="0"/>
           </a:p>
@@ -18130,13 +18322,77 @@
       </p:sp>
       <p:sp>
         <p:nvSpPr>
-          <p:cNvPr id="33" name="Shape 31"/>
-          <p:cNvSpPr/>
-          <p:nvPr/>
-        </p:nvSpPr>
-        <p:spPr>
-          <a:xfrm>
-            <a:off x="9372600" y="2468880"/>
+          <p:cNvPr id="39" name="Shape 37"/>
+          <p:cNvSpPr/>
+          <p:nvPr/>
+        </p:nvSpPr>
+        <p:spPr>
+          <a:xfrm>
+            <a:off x="10104120" y="2286000"/>
+            <a:ext cx="1737360" cy="27432"/>
+          </a:xfrm>
+          <a:prstGeom prst="rect">
+            <a:avLst/>
+          </a:prstGeom>
+          <a:solidFill>
+            <a:srgbClr val="8FA88B"/>
+          </a:solidFill>
+          <a:ln w="12700">
+            <a:solidFill>
+              <a:srgbClr val="8FA88B"/>
+            </a:solidFill>
+            <a:prstDash val="solid"/>
+          </a:ln>
+        </p:spPr>
+      </p:sp>
+      <p:sp>
+        <p:nvSpPr>
+          <p:cNvPr id="40" name="Text 38"/>
+          <p:cNvSpPr/>
+          <p:nvPr/>
+        </p:nvSpPr>
+        <p:spPr>
+          <a:xfrm>
+            <a:off x="10104120" y="2304288"/>
+            <a:ext cx="1737360" cy="274320"/>
+          </a:xfrm>
+          <a:prstGeom prst="rect">
+            <a:avLst/>
+          </a:prstGeom>
+          <a:noFill/>
+          <a:ln/>
+        </p:spPr>
+        <p:txBody>
+          <a:bodyPr wrap="square" rtlCol="0" anchor="ctr"/>
+          <a:lstStyle/>
+          <a:p>
+            <a:pPr indent="0" marL="0">
+              <a:buNone/>
+            </a:pPr>
+            <a:r>
+              <a:rPr lang="en-US" sz="900" i="1" dirty="0">
+                <a:solidFill>
+                  <a:srgbClr val="97BC62"/>
+                </a:solidFill>
+                <a:latin typeface="Microsoft YaHei" pitchFamily="34" charset="0"/>
+                <a:ea typeface="Microsoft YaHei" pitchFamily="34" charset="-122"/>
+                <a:cs typeface="Microsoft YaHei" pitchFamily="34" charset="-120"/>
+              </a:rPr>
+              <a:t>一句提纯</a:t>
+            </a:r>
+            <a:endParaRPr lang="en-US" sz="900" dirty="0"/>
+          </a:p>
+        </p:txBody>
+      </p:sp>
+      <p:sp>
+        <p:nvSpPr>
+          <p:cNvPr id="41" name="Shape 39"/>
+          <p:cNvSpPr/>
+          <p:nvPr/>
+        </p:nvSpPr>
+        <p:spPr>
+          <a:xfrm>
+            <a:off x="9372600" y="2651760"/>
             <a:ext cx="2331720" cy="27432"/>
           </a:xfrm>
           <a:prstGeom prst="rect">
@@ -18155,14 +18411,14 @@
       </p:sp>
       <p:sp>
         <p:nvSpPr>
-          <p:cNvPr id="34" name="Text 32"/>
-          <p:cNvSpPr/>
-          <p:nvPr/>
-        </p:nvSpPr>
-        <p:spPr>
-          <a:xfrm>
-            <a:off x="9372600" y="2560320"/>
-            <a:ext cx="2331720" cy="1005840"/>
+          <p:cNvPr id="42" name="Text 40"/>
+          <p:cNvSpPr/>
+          <p:nvPr/>
+        </p:nvSpPr>
+        <p:spPr>
+          <a:xfrm>
+            <a:off x="9372600" y="2743200"/>
+            <a:ext cx="2331720" cy="822960"/>
           </a:xfrm>
           <a:prstGeom prst="rect">
             <a:avLst/>
@@ -18189,7 +18445,7 @@
                 <a:ea typeface="Microsoft YaHei" pitchFamily="34" charset="-122"/>
                 <a:cs typeface="Microsoft YaHei" pitchFamily="34" charset="-120"/>
               </a:rPr>
-              <a:t>一句话观点</a:t>
+              <a:t>≤ 25 字</a:t>
             </a:r>
             <a:endParaRPr lang="en-US" sz="1000" dirty="0"/>
           </a:p>
@@ -18209,7 +18465,7 @@
                 <a:ea typeface="Microsoft YaHei" pitchFamily="34" charset="-122"/>
                 <a:cs typeface="Microsoft YaHei" pitchFamily="34" charset="-120"/>
               </a:rPr>
-              <a:t>别用「赋能」包装</a:t>
+              <a:t>可独立传播</a:t>
             </a:r>
             <a:endParaRPr lang="en-US" sz="1000" dirty="0"/>
           </a:p>
@@ -18217,7 +18473,7 @@
       </p:sp>
       <p:sp>
         <p:nvSpPr>
-          <p:cNvPr id="35" name="Shape 33"/>
+          <p:cNvPr id="43" name="Shape 41"/>
           <p:cNvSpPr/>
           <p:nvPr/>
         </p:nvSpPr>
@@ -18244,7 +18500,7 @@
       </p:sp>
       <p:sp>
         <p:nvSpPr>
-          <p:cNvPr id="36" name="Shape 34"/>
+          <p:cNvPr id="44" name="Shape 42"/>
           <p:cNvSpPr/>
           <p:nvPr/>
         </p:nvSpPr>
@@ -18269,7 +18525,7 @@
       </p:sp>
       <p:sp>
         <p:nvSpPr>
-          <p:cNvPr id="37" name="Text 35"/>
+          <p:cNvPr id="45" name="Text 43"/>
           <p:cNvSpPr/>
           <p:nvPr/>
         </p:nvSpPr>
@@ -18308,7 +18564,7 @@
       </p:sp>
       <p:sp>
         <p:nvSpPr>
-          <p:cNvPr id="38" name="Text 36"/>
+          <p:cNvPr id="46" name="Text 44"/>
           <p:cNvSpPr/>
           <p:nvPr/>
         </p:nvSpPr>
@@ -18339,7 +18595,7 @@
                 <a:ea typeface="Microsoft YaHei" pitchFamily="34" charset="-122"/>
                 <a:cs typeface="Microsoft YaHei" pitchFamily="34" charset="-120"/>
               </a:rPr>
-              <a:t>迁移</a:t>
+              <a:t>对标迁移</a:t>
             </a:r>
             <a:endParaRPr lang="en-US" sz="1400" dirty="0"/>
           </a:p>
@@ -18347,13 +18603,13 @@
       </p:sp>
       <p:sp>
         <p:nvSpPr>
-          <p:cNvPr id="39" name="Text 37"/>
-          <p:cNvSpPr/>
-          <p:nvPr/>
-        </p:nvSpPr>
-        <p:spPr>
-          <a:xfrm>
-            <a:off x="1463040" y="4434840"/>
+          <p:cNvPr id="47" name="Text 45"/>
+          <p:cNvSpPr/>
+          <p:nvPr/>
+        </p:nvSpPr>
+        <p:spPr>
+          <a:xfrm>
+            <a:off x="1463040" y="4389120"/>
             <a:ext cx="1737360" cy="274320"/>
           </a:xfrm>
           <a:prstGeom prst="rect">
@@ -18378,7 +18634,7 @@
                 <a:ea typeface="Microsoft YaHei" pitchFamily="34" charset="-122"/>
                 <a:cs typeface="Microsoft YaHei" pitchFamily="34" charset="-120"/>
               </a:rPr>
-              <a:t>30-45 秒</a:t>
+              <a:t>30-45s</a:t>
             </a:r>
             <a:endParaRPr lang="en-US" sz="1000" dirty="0"/>
           </a:p>
@@ -18386,13 +18642,77 @@
       </p:sp>
       <p:sp>
         <p:nvSpPr>
-          <p:cNvPr id="40" name="Shape 38"/>
-          <p:cNvSpPr/>
-          <p:nvPr/>
-        </p:nvSpPr>
-        <p:spPr>
-          <a:xfrm>
-            <a:off x="731520" y="4846320"/>
+          <p:cNvPr id="48" name="Shape 46"/>
+          <p:cNvSpPr/>
+          <p:nvPr/>
+        </p:nvSpPr>
+        <p:spPr>
+          <a:xfrm>
+            <a:off x="1463040" y="4663440"/>
+            <a:ext cx="1737360" cy="27432"/>
+          </a:xfrm>
+          <a:prstGeom prst="rect">
+            <a:avLst/>
+          </a:prstGeom>
+          <a:solidFill>
+            <a:srgbClr val="8FA88B"/>
+          </a:solidFill>
+          <a:ln w="12700">
+            <a:solidFill>
+              <a:srgbClr val="8FA88B"/>
+            </a:solidFill>
+            <a:prstDash val="solid"/>
+          </a:ln>
+        </p:spPr>
+      </p:sp>
+      <p:sp>
+        <p:nvSpPr>
+          <p:cNvPr id="49" name="Text 47"/>
+          <p:cNvSpPr/>
+          <p:nvPr/>
+        </p:nvSpPr>
+        <p:spPr>
+          <a:xfrm>
+            <a:off x="1463040" y="4681728"/>
+            <a:ext cx="1737360" cy="274320"/>
+          </a:xfrm>
+          <a:prstGeom prst="rect">
+            <a:avLst/>
+          </a:prstGeom>
+          <a:noFill/>
+          <a:ln/>
+        </p:spPr>
+        <p:txBody>
+          <a:bodyPr wrap="square" rtlCol="0" anchor="ctr"/>
+          <a:lstStyle/>
+          <a:p>
+            <a:pPr indent="0" marL="0">
+              <a:buNone/>
+            </a:pPr>
+            <a:r>
+              <a:rPr lang="en-US" sz="900" i="1" dirty="0">
+                <a:solidFill>
+                  <a:srgbClr val="97BC62"/>
+                </a:solidFill>
+                <a:latin typeface="Microsoft YaHei" pitchFamily="34" charset="0"/>
+                <a:ea typeface="Microsoft YaHei" pitchFamily="34" charset="-122"/>
+                <a:cs typeface="Microsoft YaHei" pitchFamily="34" charset="-120"/>
+              </a:rPr>
+              <a:t>跨域类比</a:t>
+            </a:r>
+            <a:endParaRPr lang="en-US" sz="900" dirty="0"/>
+          </a:p>
+        </p:txBody>
+      </p:sp>
+      <p:sp>
+        <p:nvSpPr>
+          <p:cNvPr id="50" name="Shape 48"/>
+          <p:cNvSpPr/>
+          <p:nvPr/>
+        </p:nvSpPr>
+        <p:spPr>
+          <a:xfrm>
+            <a:off x="731520" y="5029200"/>
             <a:ext cx="2331720" cy="27432"/>
           </a:xfrm>
           <a:prstGeom prst="rect">
@@ -18411,14 +18731,14 @@
       </p:sp>
       <p:sp>
         <p:nvSpPr>
-          <p:cNvPr id="41" name="Text 39"/>
-          <p:cNvSpPr/>
-          <p:nvPr/>
-        </p:nvSpPr>
-        <p:spPr>
-          <a:xfrm>
-            <a:off x="731520" y="4937760"/>
-            <a:ext cx="2331720" cy="1005840"/>
+          <p:cNvPr id="51" name="Text 49"/>
+          <p:cNvSpPr/>
+          <p:nvPr/>
+        </p:nvSpPr>
+        <p:spPr>
+          <a:xfrm>
+            <a:off x="731520" y="5120640"/>
+            <a:ext cx="2331720" cy="822960"/>
           </a:xfrm>
           <a:prstGeom prst="rect">
             <a:avLst/>
@@ -18445,7 +18765,7 @@
                 <a:ea typeface="Microsoft YaHei" pitchFamily="34" charset="-122"/>
                 <a:cs typeface="Microsoft YaHei" pitchFamily="34" charset="-120"/>
               </a:rPr>
-              <a:t>对标其他场景</a:t>
+              <a:t>≥ 2 个不同领域</a:t>
             </a:r>
             <a:endParaRPr lang="en-US" sz="1000" dirty="0"/>
           </a:p>
@@ -18465,7 +18785,7 @@
                 <a:ea typeface="Microsoft YaHei" pitchFamily="34" charset="-122"/>
                 <a:cs typeface="Microsoft YaHei" pitchFamily="34" charset="-120"/>
               </a:rPr>
-              <a:t>给读者代入</a:t>
+              <a:t>让观众「也能用」</a:t>
             </a:r>
             <a:endParaRPr lang="en-US" sz="1000" dirty="0"/>
           </a:p>
@@ -18473,7 +18793,7 @@
       </p:sp>
       <p:sp>
         <p:nvSpPr>
-          <p:cNvPr id="42" name="Shape 40"/>
+          <p:cNvPr id="52" name="Shape 50"/>
           <p:cNvSpPr/>
           <p:nvPr/>
         </p:nvSpPr>
@@ -18500,7 +18820,7 @@
       </p:sp>
       <p:sp>
         <p:nvSpPr>
-          <p:cNvPr id="43" name="Shape 41"/>
+          <p:cNvPr id="53" name="Shape 51"/>
           <p:cNvSpPr/>
           <p:nvPr/>
         </p:nvSpPr>
@@ -18525,7 +18845,7 @@
       </p:sp>
       <p:sp>
         <p:nvSpPr>
-          <p:cNvPr id="44" name="Text 42"/>
+          <p:cNvPr id="54" name="Text 52"/>
           <p:cNvSpPr/>
           <p:nvPr/>
         </p:nvSpPr>
@@ -18564,7 +18884,7 @@
       </p:sp>
       <p:sp>
         <p:nvSpPr>
-          <p:cNvPr id="45" name="Text 43"/>
+          <p:cNvPr id="55" name="Text 53"/>
           <p:cNvSpPr/>
           <p:nvPr/>
         </p:nvSpPr>
@@ -18595,7 +18915,7 @@
                 <a:ea typeface="Microsoft YaHei" pitchFamily="34" charset="-122"/>
                 <a:cs typeface="Microsoft YaHei" pitchFamily="34" charset="-120"/>
               </a:rPr>
-              <a:t>行动</a:t>
+              <a:t>落地行动</a:t>
             </a:r>
             <a:endParaRPr lang="en-US" sz="1400" dirty="0"/>
           </a:p>
@@ -18603,13 +18923,13 @@
       </p:sp>
       <p:sp>
         <p:nvSpPr>
-          <p:cNvPr id="46" name="Text 44"/>
-          <p:cNvSpPr/>
-          <p:nvPr/>
-        </p:nvSpPr>
-        <p:spPr>
-          <a:xfrm>
-            <a:off x="4343400" y="4434840"/>
+          <p:cNvPr id="56" name="Text 54"/>
+          <p:cNvSpPr/>
+          <p:nvPr/>
+        </p:nvSpPr>
+        <p:spPr>
+          <a:xfrm>
+            <a:off x="4343400" y="4389120"/>
             <a:ext cx="1737360" cy="274320"/>
           </a:xfrm>
           <a:prstGeom prst="rect">
@@ -18634,7 +18954,7 @@
                 <a:ea typeface="Microsoft YaHei" pitchFamily="34" charset="-122"/>
                 <a:cs typeface="Microsoft YaHei" pitchFamily="34" charset="-120"/>
               </a:rPr>
-              <a:t>15-20 秒</a:t>
+              <a:t>15-20s</a:t>
             </a:r>
             <a:endParaRPr lang="en-US" sz="1000" dirty="0"/>
           </a:p>
@@ -18642,13 +18962,77 @@
       </p:sp>
       <p:sp>
         <p:nvSpPr>
-          <p:cNvPr id="47" name="Shape 45"/>
-          <p:cNvSpPr/>
-          <p:nvPr/>
-        </p:nvSpPr>
-        <p:spPr>
-          <a:xfrm>
-            <a:off x="3611880" y="4846320"/>
+          <p:cNvPr id="57" name="Shape 55"/>
+          <p:cNvSpPr/>
+          <p:nvPr/>
+        </p:nvSpPr>
+        <p:spPr>
+          <a:xfrm>
+            <a:off x="4343400" y="4663440"/>
+            <a:ext cx="1737360" cy="27432"/>
+          </a:xfrm>
+          <a:prstGeom prst="rect">
+            <a:avLst/>
+          </a:prstGeom>
+          <a:solidFill>
+            <a:srgbClr val="8FA88B"/>
+          </a:solidFill>
+          <a:ln w="12700">
+            <a:solidFill>
+              <a:srgbClr val="8FA88B"/>
+            </a:solidFill>
+            <a:prstDash val="solid"/>
+          </a:ln>
+        </p:spPr>
+      </p:sp>
+      <p:sp>
+        <p:nvSpPr>
+          <p:cNvPr id="58" name="Text 56"/>
+          <p:cNvSpPr/>
+          <p:nvPr/>
+        </p:nvSpPr>
+        <p:spPr>
+          <a:xfrm>
+            <a:off x="4343400" y="4681728"/>
+            <a:ext cx="1737360" cy="274320"/>
+          </a:xfrm>
+          <a:prstGeom prst="rect">
+            <a:avLst/>
+          </a:prstGeom>
+          <a:noFill/>
+          <a:ln/>
+        </p:spPr>
+        <p:txBody>
+          <a:bodyPr wrap="square" rtlCol="0" anchor="ctr"/>
+          <a:lstStyle/>
+          <a:p>
+            <a:pPr indent="0" marL="0">
+              <a:buNone/>
+            </a:pPr>
+            <a:r>
+              <a:rPr lang="en-US" sz="900" i="1" dirty="0">
+                <a:solidFill>
+                  <a:srgbClr val="97BC62"/>
+                </a:solidFill>
+                <a:latin typeface="Microsoft YaHei" pitchFamily="34" charset="0"/>
+                <a:ea typeface="Microsoft YaHei" pitchFamily="34" charset="-122"/>
+                <a:cs typeface="Microsoft YaHei" pitchFamily="34" charset="-120"/>
+              </a:rPr>
+              <a:t>给抓手</a:t>
+            </a:r>
+            <a:endParaRPr lang="en-US" sz="900" dirty="0"/>
+          </a:p>
+        </p:txBody>
+      </p:sp>
+      <p:sp>
+        <p:nvSpPr>
+          <p:cNvPr id="59" name="Shape 57"/>
+          <p:cNvSpPr/>
+          <p:nvPr/>
+        </p:nvSpPr>
+        <p:spPr>
+          <a:xfrm>
+            <a:off x="3611880" y="5029200"/>
             <a:ext cx="2331720" cy="27432"/>
           </a:xfrm>
           <a:prstGeom prst="rect">
@@ -18667,14 +19051,14 @@
       </p:sp>
       <p:sp>
         <p:nvSpPr>
-          <p:cNvPr id="48" name="Text 46"/>
-          <p:cNvSpPr/>
-          <p:nvPr/>
-        </p:nvSpPr>
-        <p:spPr>
-          <a:xfrm>
-            <a:off x="3611880" y="4937760"/>
-            <a:ext cx="2331720" cy="1005840"/>
+          <p:cNvPr id="60" name="Text 58"/>
+          <p:cNvSpPr/>
+          <p:nvPr/>
+        </p:nvSpPr>
+        <p:spPr>
+          <a:xfrm>
+            <a:off x="3611880" y="5120640"/>
+            <a:ext cx="2331720" cy="822960"/>
           </a:xfrm>
           <a:prstGeom prst="rect">
             <a:avLst/>
@@ -18701,7 +19085,7 @@
                 <a:ea typeface="Microsoft YaHei" pitchFamily="34" charset="-122"/>
                 <a:cs typeface="Microsoft YaHei" pitchFamily="34" charset="-120"/>
               </a:rPr>
-              <a:t>三件套 / 三步</a:t>
+              <a:t>5 分钟能做</a:t>
             </a:r>
             <a:endParaRPr lang="en-US" sz="1000" dirty="0"/>
           </a:p>
@@ -18721,7 +19105,7 @@
                 <a:ea typeface="Microsoft YaHei" pitchFamily="34" charset="-122"/>
                 <a:cs typeface="Microsoft YaHei" pitchFamily="34" charset="-120"/>
               </a:rPr>
-              <a:t>可记忆</a:t>
+              <a:t>+ 成功标志</a:t>
             </a:r>
             <a:endParaRPr lang="en-US" sz="1000" dirty="0"/>
           </a:p>
@@ -18729,7 +19113,7 @@
       </p:sp>
       <p:sp>
         <p:nvSpPr>
-          <p:cNvPr id="49" name="Shape 47"/>
+          <p:cNvPr id="61" name="Shape 59"/>
           <p:cNvSpPr/>
           <p:nvPr/>
         </p:nvSpPr>
@@ -18756,7 +19140,7 @@
       </p:sp>
       <p:sp>
         <p:nvSpPr>
-          <p:cNvPr id="50" name="Shape 48"/>
+          <p:cNvPr id="62" name="Shape 60"/>
           <p:cNvSpPr/>
           <p:nvPr/>
         </p:nvSpPr>
@@ -18781,7 +19165,7 @@
       </p:sp>
       <p:sp>
         <p:nvSpPr>
-          <p:cNvPr id="51" name="Text 49"/>
+          <p:cNvPr id="63" name="Text 61"/>
           <p:cNvSpPr/>
           <p:nvPr/>
         </p:nvSpPr>
@@ -18820,7 +19204,7 @@
       </p:sp>
       <p:sp>
         <p:nvSpPr>
-          <p:cNvPr id="52" name="Text 50"/>
+          <p:cNvPr id="64" name="Text 62"/>
           <p:cNvSpPr/>
           <p:nvPr/>
         </p:nvSpPr>
@@ -18851,7 +19235,7 @@
                 <a:ea typeface="Microsoft YaHei" pitchFamily="34" charset="-122"/>
                 <a:cs typeface="Microsoft YaHei" pitchFamily="34" charset="-120"/>
               </a:rPr>
-              <a:t>收尾</a:t>
+              <a:t>结尾</a:t>
             </a:r>
             <a:endParaRPr lang="en-US" sz="1400" dirty="0"/>
           </a:p>
@@ -18859,13 +19243,13 @@
       </p:sp>
       <p:sp>
         <p:nvSpPr>
-          <p:cNvPr id="53" name="Text 51"/>
-          <p:cNvSpPr/>
-          <p:nvPr/>
-        </p:nvSpPr>
-        <p:spPr>
-          <a:xfrm>
-            <a:off x="7223760" y="4434840"/>
+          <p:cNvPr id="65" name="Text 63"/>
+          <p:cNvSpPr/>
+          <p:nvPr/>
+        </p:nvSpPr>
+        <p:spPr>
+          <a:xfrm>
+            <a:off x="7223760" y="4389120"/>
             <a:ext cx="1737360" cy="274320"/>
           </a:xfrm>
           <a:prstGeom prst="rect">
@@ -18890,7 +19274,7 @@
                 <a:ea typeface="Microsoft YaHei" pitchFamily="34" charset="-122"/>
                 <a:cs typeface="Microsoft YaHei" pitchFamily="34" charset="-120"/>
               </a:rPr>
-              <a:t>10-15 秒</a:t>
+              <a:t>10-15s</a:t>
             </a:r>
             <a:endParaRPr lang="en-US" sz="1000" dirty="0"/>
           </a:p>
@@ -18898,13 +19282,77 @@
       </p:sp>
       <p:sp>
         <p:nvSpPr>
-          <p:cNvPr id="54" name="Shape 52"/>
-          <p:cNvSpPr/>
-          <p:nvPr/>
-        </p:nvSpPr>
-        <p:spPr>
-          <a:xfrm>
-            <a:off x="6492240" y="4846320"/>
+          <p:cNvPr id="66" name="Shape 64"/>
+          <p:cNvSpPr/>
+          <p:nvPr/>
+        </p:nvSpPr>
+        <p:spPr>
+          <a:xfrm>
+            <a:off x="7223760" y="4663440"/>
+            <a:ext cx="1737360" cy="27432"/>
+          </a:xfrm>
+          <a:prstGeom prst="rect">
+            <a:avLst/>
+          </a:prstGeom>
+          <a:solidFill>
+            <a:srgbClr val="8FA88B"/>
+          </a:solidFill>
+          <a:ln w="12700">
+            <a:solidFill>
+              <a:srgbClr val="8FA88B"/>
+            </a:solidFill>
+            <a:prstDash val="solid"/>
+          </a:ln>
+        </p:spPr>
+      </p:sp>
+      <p:sp>
+        <p:nvSpPr>
+          <p:cNvPr id="67" name="Text 65"/>
+          <p:cNvSpPr/>
+          <p:nvPr/>
+        </p:nvSpPr>
+        <p:spPr>
+          <a:xfrm>
+            <a:off x="7223760" y="4681728"/>
+            <a:ext cx="1737360" cy="274320"/>
+          </a:xfrm>
+          <a:prstGeom prst="rect">
+            <a:avLst/>
+          </a:prstGeom>
+          <a:noFill/>
+          <a:ln/>
+        </p:spPr>
+        <p:txBody>
+          <a:bodyPr wrap="square" rtlCol="0" anchor="ctr"/>
+          <a:lstStyle/>
+          <a:p>
+            <a:pPr indent="0" marL="0">
+              <a:buNone/>
+            </a:pPr>
+            <a:r>
+              <a:rPr lang="en-US" sz="900" i="1" dirty="0">
+                <a:solidFill>
+                  <a:srgbClr val="97BC62"/>
+                </a:solidFill>
+                <a:latin typeface="Microsoft YaHei" pitchFamily="34" charset="0"/>
+                <a:ea typeface="Microsoft YaHei" pitchFamily="34" charset="-122"/>
+                <a:cs typeface="Microsoft YaHei" pitchFamily="34" charset="-120"/>
+              </a:rPr>
+              <a:t>引导互动</a:t>
+            </a:r>
+            <a:endParaRPr lang="en-US" sz="900" dirty="0"/>
+          </a:p>
+        </p:txBody>
+      </p:sp>
+      <p:sp>
+        <p:nvSpPr>
+          <p:cNvPr id="68" name="Shape 66"/>
+          <p:cNvSpPr/>
+          <p:nvPr/>
+        </p:nvSpPr>
+        <p:spPr>
+          <a:xfrm>
+            <a:off x="6492240" y="5029200"/>
             <a:ext cx="2331720" cy="27432"/>
           </a:xfrm>
           <a:prstGeom prst="rect">
@@ -18923,14 +19371,14 @@
       </p:sp>
       <p:sp>
         <p:nvSpPr>
-          <p:cNvPr id="55" name="Text 53"/>
-          <p:cNvSpPr/>
-          <p:nvPr/>
-        </p:nvSpPr>
-        <p:spPr>
-          <a:xfrm>
-            <a:off x="6492240" y="4937760"/>
-            <a:ext cx="2331720" cy="1005840"/>
+          <p:cNvPr id="69" name="Text 67"/>
+          <p:cNvSpPr/>
+          <p:nvPr/>
+        </p:nvSpPr>
+        <p:spPr>
+          <a:xfrm>
+            <a:off x="6492240" y="5120640"/>
+            <a:ext cx="2331720" cy="822960"/>
           </a:xfrm>
           <a:prstGeom prst="rect">
             <a:avLst/>
@@ -18957,7 +19405,7 @@
                 <a:ea typeface="Microsoft YaHei" pitchFamily="34" charset="-122"/>
                 <a:cs typeface="Microsoft YaHei" pitchFamily="34" charset="-120"/>
               </a:rPr>
-              <a:t>金句 + 关注</a:t>
+              <a:t>回应开场 / 反问</a:t>
             </a:r>
             <a:endParaRPr lang="en-US" sz="1000" dirty="0"/>
           </a:p>
@@ -18977,7 +19425,7 @@
                 <a:ea typeface="Microsoft YaHei" pitchFamily="34" charset="-122"/>
                 <a:cs typeface="Microsoft YaHei" pitchFamily="34" charset="-120"/>
               </a:rPr>
-              <a:t>被 动收尾</a:t>
+              <a:t>钩子延伸</a:t>
             </a:r>
             <a:endParaRPr lang="en-US" sz="1000" dirty="0"/>
           </a:p>
@@ -18985,7 +19433,7 @@
       </p:sp>
       <p:sp>
         <p:nvSpPr>
-          <p:cNvPr id="56" name="Shape 54"/>
+          <p:cNvPr id="70" name="Shape 68"/>
           <p:cNvSpPr/>
           <p:nvPr/>
         </p:nvSpPr>
@@ -19010,7 +19458,7 @@
       </p:sp>
       <p:sp>
         <p:nvSpPr>
-          <p:cNvPr id="57" name="Text 55"/>
+          <p:cNvPr id="71" name="Text 69"/>
           <p:cNvSpPr/>
           <p:nvPr/>
         </p:nvSpPr>
@@ -19041,7 +19489,7 @@
                 <a:ea typeface="Microsoft YaHei" pitchFamily="34" charset="-122"/>
                 <a:cs typeface="Microsoft YaHei" pitchFamily="34" charset="-120"/>
               </a:rPr>
-              <a:t>⚡ 钩子抓眼球 → 故事抓信任 → 行动抓转化。</a:t>
+              <a:t>⚡ 开场抓眼球 → PROBLEM 抓共鸣 → 故事抓信任 → 落地抓转化。</a:t>
             </a:r>
             <a:endParaRPr lang="en-US" sz="1400" dirty="0"/>
           </a:p>
